--- a/구두발표_콩vs로메인상추_v1.pptx
+++ b/구두발표_콩vs로메인상추_v1.pptx
@@ -6336,7 +6336,7 @@
       </p:sp>
       <p:pic>
         <p:nvPicPr>
-          <p:cNvPr id="20" name="Picture 13" descr="image.png"/>
+          <p:cNvPr id="14" name="Picture 13" descr="image.png"/>
           <p:cNvPicPr>
             <a:picLocks noChangeAspect="1"/>
           </p:cNvPicPr>
@@ -8538,7 +8538,7 @@
       </p:sp>
       <p:pic>
         <p:nvPicPr>
-          <p:cNvPr id="20" name="Picture 13" descr="image.png"/>
+          <p:cNvPr id="14" name="Picture 13" descr="image.png"/>
           <p:cNvPicPr>
             <a:picLocks noChangeAspect="1"/>
           </p:cNvPicPr>
@@ -10531,7 +10531,7 @@
       </p:sp>
       <p:pic>
         <p:nvPicPr>
-          <p:cNvPr id="51" name="Picture 26" descr="image.png"/>
+          <p:cNvPr id="27" name="Picture 26" descr="image.png"/>
           <p:cNvPicPr>
             <a:picLocks noChangeAspect="1"/>
           </p:cNvPicPr>
@@ -13294,252 +13294,6 @@
                     </p:cTn>
                   </p:par>
                   <p:par>
-                    <p:cTn id="19" fill="hold">
-                      <p:stCondLst>
-                        <p:cond delay="indefinite"/>
-                      </p:stCondLst>
-                      <p:childTnLst>
-                        <p:par>
-                          <p:cTn id="20" fill="hold">
-                            <p:stCondLst>
-                              <p:cond delay="0"/>
-                            </p:stCondLst>
-                            <p:childTnLst>
-                              <p:par>
-                                <p:cTn id="21" presetID="10" presetClass="entr" presetSubtype="0" fill="hold" grpId="0" nodeType="clickEffect">
-                                  <p:stCondLst>
-                                    <p:cond delay="0"/>
-                                  </p:stCondLst>
-                                  <p:childTnLst>
-                                    <p:set>
-                                      <p:cBhvr>
-                                        <p:cTn id="22" dur="1" fill="hold">
-                                          <p:stCondLst>
-                                            <p:cond delay="0"/>
-                                          </p:stCondLst>
-                                        </p:cTn>
-                                        <p:tgtEl>
-                                          <p:spTgt spid="28"/>
-                                        </p:tgtEl>
-                                        <p:attrNameLst>
-                                          <p:attrName>style.visibility</p:attrName>
-                                        </p:attrNameLst>
-                                      </p:cBhvr>
-                                      <p:to>
-                                        <p:strVal val="visible"/>
-                                      </p:to>
-                                    </p:set>
-                                    <p:animEffect transition="in" filter="fade">
-                                      <p:cBhvr>
-                                        <p:cTn id="23" dur="500"/>
-                                        <p:tgtEl>
-                                          <p:spTgt spid="28"/>
-                                        </p:tgtEl>
-                                      </p:cBhvr>
-                                    </p:animEffect>
-                                  </p:childTnLst>
-                                </p:cTn>
-                              </p:par>
-                              <p:par>
-                                <p:cTn id="24" presetID="10" presetClass="entr" presetSubtype="0" fill="hold" grpId="0" nodeType="withEffect">
-                                  <p:stCondLst>
-                                    <p:cond delay="0"/>
-                                  </p:stCondLst>
-                                  <p:childTnLst>
-                                    <p:set>
-                                      <p:cBhvr>
-                                        <p:cTn id="25" dur="1" fill="hold">
-                                          <p:stCondLst>
-                                            <p:cond delay="0"/>
-                                          </p:stCondLst>
-                                        </p:cTn>
-                                        <p:tgtEl>
-                                          <p:spTgt spid="29"/>
-                                        </p:tgtEl>
-                                        <p:attrNameLst>
-                                          <p:attrName>style.visibility</p:attrName>
-                                        </p:attrNameLst>
-                                      </p:cBhvr>
-                                      <p:to>
-                                        <p:strVal val="visible"/>
-                                      </p:to>
-                                    </p:set>
-                                    <p:animEffect transition="in" filter="fade">
-                                      <p:cBhvr>
-                                        <p:cTn id="26" dur="500"/>
-                                        <p:tgtEl>
-                                          <p:spTgt spid="29"/>
-                                        </p:tgtEl>
-                                      </p:cBhvr>
-                                    </p:animEffect>
-                                  </p:childTnLst>
-                                </p:cTn>
-                              </p:par>
-                              <p:par>
-                                <p:cTn id="27" presetID="10" presetClass="entr" presetSubtype="0" fill="hold" grpId="0" nodeType="withEffect">
-                                  <p:stCondLst>
-                                    <p:cond delay="0"/>
-                                  </p:stCondLst>
-                                  <p:childTnLst>
-                                    <p:set>
-                                      <p:cBhvr>
-                                        <p:cTn id="28" dur="1" fill="hold">
-                                          <p:stCondLst>
-                                            <p:cond delay="0"/>
-                                          </p:stCondLst>
-                                        </p:cTn>
-                                        <p:tgtEl>
-                                          <p:spTgt spid="30"/>
-                                        </p:tgtEl>
-                                        <p:attrNameLst>
-                                          <p:attrName>style.visibility</p:attrName>
-                                        </p:attrNameLst>
-                                      </p:cBhvr>
-                                      <p:to>
-                                        <p:strVal val="visible"/>
-                                      </p:to>
-                                    </p:set>
-                                    <p:animEffect transition="in" filter="fade">
-                                      <p:cBhvr>
-                                        <p:cTn id="29" dur="500"/>
-                                        <p:tgtEl>
-                                          <p:spTgt spid="30"/>
-                                        </p:tgtEl>
-                                      </p:cBhvr>
-                                    </p:animEffect>
-                                  </p:childTnLst>
-                                </p:cTn>
-                              </p:par>
-                            </p:childTnLst>
-                          </p:cTn>
-                        </p:par>
-                      </p:childTnLst>
-                    </p:cTn>
-                  </p:par>
-                  <p:par>
-                    <p:cTn id="30" fill="hold">
-                      <p:stCondLst>
-                        <p:cond delay="indefinite"/>
-                      </p:stCondLst>
-                      <p:childTnLst>
-                        <p:par>
-                          <p:cTn id="31" fill="hold">
-                            <p:stCondLst>
-                              <p:cond delay="0"/>
-                            </p:stCondLst>
-                            <p:childTnLst>
-                              <p:par>
-                                <p:cTn id="32" presetID="10" presetClass="entr" presetSubtype="0" fill="hold" grpId="0" nodeType="clickEffect">
-                                  <p:stCondLst>
-                                    <p:cond delay="0"/>
-                                  </p:stCondLst>
-                                  <p:childTnLst>
-                                    <p:set>
-                                      <p:cBhvr>
-                                        <p:cTn id="33" dur="1" fill="hold">
-                                          <p:stCondLst>
-                                            <p:cond delay="0"/>
-                                          </p:stCondLst>
-                                        </p:cTn>
-                                        <p:tgtEl>
-                                          <p:spTgt spid="31"/>
-                                        </p:tgtEl>
-                                        <p:attrNameLst>
-                                          <p:attrName>style.visibility</p:attrName>
-                                        </p:attrNameLst>
-                                      </p:cBhvr>
-                                      <p:to>
-                                        <p:strVal val="visible"/>
-                                      </p:to>
-                                    </p:set>
-                                    <p:animEffect transition="in" filter="fade">
-                                      <p:cBhvr>
-                                        <p:cTn id="34" dur="500"/>
-                                        <p:tgtEl>
-                                          <p:spTgt spid="31"/>
-                                        </p:tgtEl>
-                                      </p:cBhvr>
-                                    </p:animEffect>
-                                  </p:childTnLst>
-                                </p:cTn>
-                              </p:par>
-                              <p:par>
-                                <p:cTn id="35" presetID="10" presetClass="entr" presetSubtype="0" fill="hold" grpId="0" nodeType="withEffect">
-                                  <p:stCondLst>
-                                    <p:cond delay="0"/>
-                                  </p:stCondLst>
-                                  <p:childTnLst>
-                                    <p:set>
-                                      <p:cBhvr>
-                                        <p:cTn id="36" dur="1" fill="hold">
-                                          <p:stCondLst>
-                                            <p:cond delay="0"/>
-                                          </p:stCondLst>
-                                        </p:cTn>
-                                        <p:tgtEl>
-                                          <p:spTgt spid="32"/>
-                                        </p:tgtEl>
-                                        <p:attrNameLst>
-                                          <p:attrName>style.visibility</p:attrName>
-                                        </p:attrNameLst>
-                                      </p:cBhvr>
-                                      <p:to>
-                                        <p:strVal val="visible"/>
-                                      </p:to>
-                                    </p:set>
-                                    <p:animEffect transition="in" filter="fade">
-                                      <p:cBhvr>
-                                        <p:cTn id="37" dur="500"/>
-                                        <p:tgtEl>
-                                          <p:spTgt spid="32"/>
-                                        </p:tgtEl>
-                                      </p:cBhvr>
-                                    </p:animEffect>
-                                  </p:childTnLst>
-                                </p:cTn>
-                              </p:par>
-                              <p:par>
-                                <p:cTn id="38" presetID="10" presetClass="entr" presetSubtype="0" fill="hold" grpId="0" nodeType="withEffect">
-                                  <p:stCondLst>
-                                    <p:cond delay="0"/>
-                                  </p:stCondLst>
-                                  <p:childTnLst>
-                                    <p:set>
-                                      <p:cBhvr>
-                                        <p:cTn id="39" dur="1" fill="hold">
-                                          <p:stCondLst>
-                                            <p:cond delay="0"/>
-                                          </p:stCondLst>
-                                        </p:cTn>
-                                        <p:tgtEl>
-                                          <p:spTgt spid="33"/>
-                                        </p:tgtEl>
-                                        <p:attrNameLst>
-                                          <p:attrName>style.visibility</p:attrName>
-                                        </p:attrNameLst>
-                                      </p:cBhvr>
-                                      <p:to>
-                                        <p:strVal val="visible"/>
-                                      </p:to>
-                                    </p:set>
-                                    <p:animEffect transition="in" filter="fade">
-                                      <p:cBhvr>
-                                        <p:cTn id="40" dur="500"/>
-                                        <p:tgtEl>
-                                          <p:spTgt spid="33"/>
-                                        </p:tgtEl>
-                                      </p:cBhvr>
-                                    </p:animEffect>
-                                  </p:childTnLst>
-                                </p:cTn>
-                              </p:par>
-                            </p:childTnLst>
-                          </p:cTn>
-                        </p:par>
-                      </p:childTnLst>
-                    </p:cTn>
-                  </p:par>
-                  <p:par>
                     <p:cTn id="41" fill="hold">
                       <p:stCondLst>
                         <p:cond delay="indefinite"/>
@@ -13615,12 +13369,6 @@
     </p:tnLst>
     <p:bldLst>
       <p:bldP spid="25" grpId="0" animBg="1"/>
-      <p:bldP spid="28" grpId="0" animBg="1"/>
-      <p:bldP spid="29" grpId="0" animBg="1"/>
-      <p:bldP spid="30" grpId="0" animBg="1"/>
-      <p:bldP spid="31" grpId="0" animBg="1"/>
-      <p:bldP spid="32" grpId="0" animBg="1"/>
-      <p:bldP spid="33" grpId="0" animBg="1"/>
       <p:bldP spid="34" grpId="0" animBg="1"/>
       <p:bldP spid="35" grpId="0" animBg="1"/>
       <p:bldP spid="36" grpId="0" animBg="1"/>
@@ -13874,7 +13622,7 @@
       </p:sp>
       <p:pic>
         <p:nvPicPr>
-          <p:cNvPr id="51" name="Picture 26" descr="image.png"/>
+          <p:cNvPr id="27" name="Picture 26" descr="image.png"/>
           <p:cNvPicPr>
             <a:picLocks noChangeAspect="1"/>
           </p:cNvPicPr>
@@ -18231,532 +17979,6 @@
                     </p:cTn>
                   </p:par>
                   <p:par>
-                    <p:cTn id="67" fill="hold">
-                      <p:stCondLst>
-                        <p:cond delay="indefinite"/>
-                      </p:stCondLst>
-                      <p:childTnLst>
-                        <p:par>
-                          <p:cTn id="68" fill="hold">
-                            <p:stCondLst>
-                              <p:cond delay="0"/>
-                            </p:stCondLst>
-                            <p:childTnLst>
-                              <p:par>
-                                <p:cTn id="69" presetID="10" presetClass="entr" presetSubtype="0" fill="hold" grpId="0" nodeType="clickEffect">
-                                  <p:stCondLst>
-                                    <p:cond delay="0"/>
-                                  </p:stCondLst>
-                                  <p:childTnLst>
-                                    <p:set>
-                                      <p:cBhvr>
-                                        <p:cTn id="70" dur="1" fill="hold">
-                                          <p:stCondLst>
-                                            <p:cond delay="0"/>
-                                          </p:stCondLst>
-                                        </p:cTn>
-                                        <p:tgtEl>
-                                          <p:spTgt spid="29"/>
-                                        </p:tgtEl>
-                                        <p:attrNameLst>
-                                          <p:attrName>style.visibility</p:attrName>
-                                        </p:attrNameLst>
-                                      </p:cBhvr>
-                                      <p:to>
-                                        <p:strVal val="visible"/>
-                                      </p:to>
-                                    </p:set>
-                                    <p:animEffect transition="in" filter="fade">
-                                      <p:cBhvr>
-                                        <p:cTn id="71" dur="500"/>
-                                        <p:tgtEl>
-                                          <p:spTgt spid="29"/>
-                                        </p:tgtEl>
-                                      </p:cBhvr>
-                                    </p:animEffect>
-                                  </p:childTnLst>
-                                </p:cTn>
-                              </p:par>
-                              <p:par>
-                                <p:cTn id="72" presetID="10" presetClass="entr" presetSubtype="0" fill="hold" grpId="0" nodeType="withEffect">
-                                  <p:stCondLst>
-                                    <p:cond delay="0"/>
-                                  </p:stCondLst>
-                                  <p:childTnLst>
-                                    <p:set>
-                                      <p:cBhvr>
-                                        <p:cTn id="73" dur="1" fill="hold">
-                                          <p:stCondLst>
-                                            <p:cond delay="0"/>
-                                          </p:stCondLst>
-                                        </p:cTn>
-                                        <p:tgtEl>
-                                          <p:spTgt spid="36"/>
-                                        </p:tgtEl>
-                                        <p:attrNameLst>
-                                          <p:attrName>style.visibility</p:attrName>
-                                        </p:attrNameLst>
-                                      </p:cBhvr>
-                                      <p:to>
-                                        <p:strVal val="visible"/>
-                                      </p:to>
-                                    </p:set>
-                                    <p:animEffect transition="in" filter="fade">
-                                      <p:cBhvr>
-                                        <p:cTn id="74" dur="500"/>
-                                        <p:tgtEl>
-                                          <p:spTgt spid="36"/>
-                                        </p:tgtEl>
-                                      </p:cBhvr>
-                                    </p:animEffect>
-                                  </p:childTnLst>
-                                </p:cTn>
-                              </p:par>
-                              <p:par>
-                                <p:cTn id="75" presetID="10" presetClass="entr" presetSubtype="0" fill="hold" grpId="0" nodeType="withEffect">
-                                  <p:stCondLst>
-                                    <p:cond delay="0"/>
-                                  </p:stCondLst>
-                                  <p:childTnLst>
-                                    <p:set>
-                                      <p:cBhvr>
-                                        <p:cTn id="76" dur="1" fill="hold">
-                                          <p:stCondLst>
-                                            <p:cond delay="0"/>
-                                          </p:stCondLst>
-                                        </p:cTn>
-                                        <p:tgtEl>
-                                          <p:spTgt spid="43"/>
-                                        </p:tgtEl>
-                                        <p:attrNameLst>
-                                          <p:attrName>style.visibility</p:attrName>
-                                        </p:attrNameLst>
-                                      </p:cBhvr>
-                                      <p:to>
-                                        <p:strVal val="visible"/>
-                                      </p:to>
-                                    </p:set>
-                                    <p:animEffect transition="in" filter="fade">
-                                      <p:cBhvr>
-                                        <p:cTn id="77" dur="500"/>
-                                        <p:tgtEl>
-                                          <p:spTgt spid="43"/>
-                                        </p:tgtEl>
-                                      </p:cBhvr>
-                                    </p:animEffect>
-                                  </p:childTnLst>
-                                </p:cTn>
-                              </p:par>
-                              <p:par>
-                                <p:cTn id="78" presetID="10" presetClass="entr" presetSubtype="0" fill="hold" grpId="0" nodeType="withEffect">
-                                  <p:stCondLst>
-                                    <p:cond delay="0"/>
-                                  </p:stCondLst>
-                                  <p:childTnLst>
-                                    <p:set>
-                                      <p:cBhvr>
-                                        <p:cTn id="79" dur="1" fill="hold">
-                                          <p:stCondLst>
-                                            <p:cond delay="0"/>
-                                          </p:stCondLst>
-                                        </p:cTn>
-                                        <p:tgtEl>
-                                          <p:spTgt spid="50"/>
-                                        </p:tgtEl>
-                                        <p:attrNameLst>
-                                          <p:attrName>style.visibility</p:attrName>
-                                        </p:attrNameLst>
-                                      </p:cBhvr>
-                                      <p:to>
-                                        <p:strVal val="visible"/>
-                                      </p:to>
-                                    </p:set>
-                                    <p:animEffect transition="in" filter="fade">
-                                      <p:cBhvr>
-                                        <p:cTn id="80" dur="500"/>
-                                        <p:tgtEl>
-                                          <p:spTgt spid="50"/>
-                                        </p:tgtEl>
-                                      </p:cBhvr>
-                                    </p:animEffect>
-                                  </p:childTnLst>
-                                </p:cTn>
-                              </p:par>
-                              <p:par>
-                                <p:cTn id="81" presetID="10" presetClass="entr" presetSubtype="0" fill="hold" grpId="0" nodeType="withEffect">
-                                  <p:stCondLst>
-                                    <p:cond delay="0"/>
-                                  </p:stCondLst>
-                                  <p:childTnLst>
-                                    <p:set>
-                                      <p:cBhvr>
-                                        <p:cTn id="82" dur="1" fill="hold">
-                                          <p:stCondLst>
-                                            <p:cond delay="0"/>
-                                          </p:stCondLst>
-                                        </p:cTn>
-                                        <p:tgtEl>
-                                          <p:spTgt spid="57"/>
-                                        </p:tgtEl>
-                                        <p:attrNameLst>
-                                          <p:attrName>style.visibility</p:attrName>
-                                        </p:attrNameLst>
-                                      </p:cBhvr>
-                                      <p:to>
-                                        <p:strVal val="visible"/>
-                                      </p:to>
-                                    </p:set>
-                                    <p:animEffect transition="in" filter="fade">
-                                      <p:cBhvr>
-                                        <p:cTn id="83" dur="500"/>
-                                        <p:tgtEl>
-                                          <p:spTgt spid="57"/>
-                                        </p:tgtEl>
-                                      </p:cBhvr>
-                                    </p:animEffect>
-                                  </p:childTnLst>
-                                </p:cTn>
-                              </p:par>
-                              <p:par>
-                                <p:cTn id="84" presetID="10" presetClass="entr" presetSubtype="0" fill="hold" grpId="0" nodeType="withEffect">
-                                  <p:stCondLst>
-                                    <p:cond delay="0"/>
-                                  </p:stCondLst>
-                                  <p:childTnLst>
-                                    <p:set>
-                                      <p:cBhvr>
-                                        <p:cTn id="85" dur="1" fill="hold">
-                                          <p:stCondLst>
-                                            <p:cond delay="0"/>
-                                          </p:stCondLst>
-                                        </p:cTn>
-                                        <p:tgtEl>
-                                          <p:spTgt spid="64"/>
-                                        </p:tgtEl>
-                                        <p:attrNameLst>
-                                          <p:attrName>style.visibility</p:attrName>
-                                        </p:attrNameLst>
-                                      </p:cBhvr>
-                                      <p:to>
-                                        <p:strVal val="visible"/>
-                                      </p:to>
-                                    </p:set>
-                                    <p:animEffect transition="in" filter="fade">
-                                      <p:cBhvr>
-                                        <p:cTn id="86" dur="500"/>
-                                        <p:tgtEl>
-                                          <p:spTgt spid="64"/>
-                                        </p:tgtEl>
-                                      </p:cBhvr>
-                                    </p:animEffect>
-                                  </p:childTnLst>
-                                </p:cTn>
-                              </p:par>
-                              <p:par>
-                                <p:cTn id="87" presetID="10" presetClass="entr" presetSubtype="0" fill="hold" grpId="0" nodeType="withEffect">
-                                  <p:stCondLst>
-                                    <p:cond delay="0"/>
-                                  </p:stCondLst>
-                                  <p:childTnLst>
-                                    <p:set>
-                                      <p:cBhvr>
-                                        <p:cTn id="88" dur="1" fill="hold">
-                                          <p:stCondLst>
-                                            <p:cond delay="0"/>
-                                          </p:stCondLst>
-                                        </p:cTn>
-                                        <p:tgtEl>
-                                          <p:spTgt spid="71"/>
-                                        </p:tgtEl>
-                                        <p:attrNameLst>
-                                          <p:attrName>style.visibility</p:attrName>
-                                        </p:attrNameLst>
-                                      </p:cBhvr>
-                                      <p:to>
-                                        <p:strVal val="visible"/>
-                                      </p:to>
-                                    </p:set>
-                                    <p:animEffect transition="in" filter="fade">
-                                      <p:cBhvr>
-                                        <p:cTn id="89" dur="500"/>
-                                        <p:tgtEl>
-                                          <p:spTgt spid="71"/>
-                                        </p:tgtEl>
-                                      </p:cBhvr>
-                                    </p:animEffect>
-                                  </p:childTnLst>
-                                </p:cTn>
-                              </p:par>
-                            </p:childTnLst>
-                          </p:cTn>
-                        </p:par>
-                      </p:childTnLst>
-                    </p:cTn>
-                  </p:par>
-                  <p:par>
-                    <p:cTn id="90" fill="hold">
-                      <p:stCondLst>
-                        <p:cond delay="indefinite"/>
-                      </p:stCondLst>
-                      <p:childTnLst>
-                        <p:par>
-                          <p:cTn id="91" fill="hold">
-                            <p:stCondLst>
-                              <p:cond delay="0"/>
-                            </p:stCondLst>
-                            <p:childTnLst>
-                              <p:par>
-                                <p:cTn id="92" presetID="10" presetClass="entr" presetSubtype="0" fill="hold" grpId="0" nodeType="clickEffect">
-                                  <p:stCondLst>
-                                    <p:cond delay="0"/>
-                                  </p:stCondLst>
-                                  <p:childTnLst>
-                                    <p:set>
-                                      <p:cBhvr>
-                                        <p:cTn id="93" dur="1" fill="hold">
-                                          <p:stCondLst>
-                                            <p:cond delay="0"/>
-                                          </p:stCondLst>
-                                        </p:cTn>
-                                        <p:tgtEl>
-                                          <p:spTgt spid="30"/>
-                                        </p:tgtEl>
-                                        <p:attrNameLst>
-                                          <p:attrName>style.visibility</p:attrName>
-                                        </p:attrNameLst>
-                                      </p:cBhvr>
-                                      <p:to>
-                                        <p:strVal val="visible"/>
-                                      </p:to>
-                                    </p:set>
-                                    <p:animEffect transition="in" filter="fade">
-                                      <p:cBhvr>
-                                        <p:cTn id="94" dur="500"/>
-                                        <p:tgtEl>
-                                          <p:spTgt spid="30"/>
-                                        </p:tgtEl>
-                                      </p:cBhvr>
-                                    </p:animEffect>
-                                  </p:childTnLst>
-                                </p:cTn>
-                              </p:par>
-                              <p:par>
-                                <p:cTn id="95" presetID="10" presetClass="entr" presetSubtype="0" fill="hold" grpId="0" nodeType="withEffect">
-                                  <p:stCondLst>
-                                    <p:cond delay="0"/>
-                                  </p:stCondLst>
-                                  <p:childTnLst>
-                                    <p:set>
-                                      <p:cBhvr>
-                                        <p:cTn id="96" dur="1" fill="hold">
-                                          <p:stCondLst>
-                                            <p:cond delay="0"/>
-                                          </p:stCondLst>
-                                        </p:cTn>
-                                        <p:tgtEl>
-                                          <p:spTgt spid="37"/>
-                                        </p:tgtEl>
-                                        <p:attrNameLst>
-                                          <p:attrName>style.visibility</p:attrName>
-                                        </p:attrNameLst>
-                                      </p:cBhvr>
-                                      <p:to>
-                                        <p:strVal val="visible"/>
-                                      </p:to>
-                                    </p:set>
-                                    <p:animEffect transition="in" filter="fade">
-                                      <p:cBhvr>
-                                        <p:cTn id="97" dur="500"/>
-                                        <p:tgtEl>
-                                          <p:spTgt spid="37"/>
-                                        </p:tgtEl>
-                                      </p:cBhvr>
-                                    </p:animEffect>
-                                  </p:childTnLst>
-                                </p:cTn>
-                              </p:par>
-                              <p:par>
-                                <p:cTn id="98" presetID="10" presetClass="entr" presetSubtype="0" fill="hold" grpId="0" nodeType="withEffect">
-                                  <p:stCondLst>
-                                    <p:cond delay="0"/>
-                                  </p:stCondLst>
-                                  <p:childTnLst>
-                                    <p:set>
-                                      <p:cBhvr>
-                                        <p:cTn id="99" dur="1" fill="hold">
-                                          <p:stCondLst>
-                                            <p:cond delay="0"/>
-                                          </p:stCondLst>
-                                        </p:cTn>
-                                        <p:tgtEl>
-                                          <p:spTgt spid="44"/>
-                                        </p:tgtEl>
-                                        <p:attrNameLst>
-                                          <p:attrName>style.visibility</p:attrName>
-                                        </p:attrNameLst>
-                                      </p:cBhvr>
-                                      <p:to>
-                                        <p:strVal val="visible"/>
-                                      </p:to>
-                                    </p:set>
-                                    <p:animEffect transition="in" filter="fade">
-                                      <p:cBhvr>
-                                        <p:cTn id="100" dur="500"/>
-                                        <p:tgtEl>
-                                          <p:spTgt spid="44"/>
-                                        </p:tgtEl>
-                                      </p:cBhvr>
-                                    </p:animEffect>
-                                  </p:childTnLst>
-                                </p:cTn>
-                              </p:par>
-                              <p:par>
-                                <p:cTn id="101" presetID="10" presetClass="entr" presetSubtype="0" fill="hold" grpId="0" nodeType="withEffect">
-                                  <p:stCondLst>
-                                    <p:cond delay="0"/>
-                                  </p:stCondLst>
-                                  <p:childTnLst>
-                                    <p:set>
-                                      <p:cBhvr>
-                                        <p:cTn id="102" dur="1" fill="hold">
-                                          <p:stCondLst>
-                                            <p:cond delay="0"/>
-                                          </p:stCondLst>
-                                        </p:cTn>
-                                        <p:tgtEl>
-                                          <p:spTgt spid="51"/>
-                                        </p:tgtEl>
-                                        <p:attrNameLst>
-                                          <p:attrName>style.visibility</p:attrName>
-                                        </p:attrNameLst>
-                                      </p:cBhvr>
-                                      <p:to>
-                                        <p:strVal val="visible"/>
-                                      </p:to>
-                                    </p:set>
-                                    <p:animEffect transition="in" filter="fade">
-                                      <p:cBhvr>
-                                        <p:cTn id="103" dur="500"/>
-                                        <p:tgtEl>
-                                          <p:spTgt spid="51"/>
-                                        </p:tgtEl>
-                                      </p:cBhvr>
-                                    </p:animEffect>
-                                  </p:childTnLst>
-                                </p:cTn>
-                              </p:par>
-                              <p:par>
-                                <p:cTn id="104" presetID="10" presetClass="entr" presetSubtype="0" fill="hold" grpId="0" nodeType="withEffect">
-                                  <p:stCondLst>
-                                    <p:cond delay="0"/>
-                                  </p:stCondLst>
-                                  <p:childTnLst>
-                                    <p:set>
-                                      <p:cBhvr>
-                                        <p:cTn id="105" dur="1" fill="hold">
-                                          <p:stCondLst>
-                                            <p:cond delay="0"/>
-                                          </p:stCondLst>
-                                        </p:cTn>
-                                        <p:tgtEl>
-                                          <p:spTgt spid="58"/>
-                                        </p:tgtEl>
-                                        <p:attrNameLst>
-                                          <p:attrName>style.visibility</p:attrName>
-                                        </p:attrNameLst>
-                                      </p:cBhvr>
-                                      <p:to>
-                                        <p:strVal val="visible"/>
-                                      </p:to>
-                                    </p:set>
-                                    <p:animEffect transition="in" filter="fade">
-                                      <p:cBhvr>
-                                        <p:cTn id="106" dur="500"/>
-                                        <p:tgtEl>
-                                          <p:spTgt spid="58"/>
-                                        </p:tgtEl>
-                                      </p:cBhvr>
-                                    </p:animEffect>
-                                  </p:childTnLst>
-                                </p:cTn>
-                              </p:par>
-                              <p:par>
-                                <p:cTn id="107" presetID="10" presetClass="entr" presetSubtype="0" fill="hold" grpId="0" nodeType="withEffect">
-                                  <p:stCondLst>
-                                    <p:cond delay="0"/>
-                                  </p:stCondLst>
-                                  <p:childTnLst>
-                                    <p:set>
-                                      <p:cBhvr>
-                                        <p:cTn id="108" dur="1" fill="hold">
-                                          <p:stCondLst>
-                                            <p:cond delay="0"/>
-                                          </p:stCondLst>
-                                        </p:cTn>
-                                        <p:tgtEl>
-                                          <p:spTgt spid="65"/>
-                                        </p:tgtEl>
-                                        <p:attrNameLst>
-                                          <p:attrName>style.visibility</p:attrName>
-                                        </p:attrNameLst>
-                                      </p:cBhvr>
-                                      <p:to>
-                                        <p:strVal val="visible"/>
-                                      </p:to>
-                                    </p:set>
-                                    <p:animEffect transition="in" filter="fade">
-                                      <p:cBhvr>
-                                        <p:cTn id="109" dur="500"/>
-                                        <p:tgtEl>
-                                          <p:spTgt spid="65"/>
-                                        </p:tgtEl>
-                                      </p:cBhvr>
-                                    </p:animEffect>
-                                  </p:childTnLst>
-                                </p:cTn>
-                              </p:par>
-                              <p:par>
-                                <p:cTn id="110" presetID="10" presetClass="entr" presetSubtype="0" fill="hold" grpId="0" nodeType="withEffect">
-                                  <p:stCondLst>
-                                    <p:cond delay="0"/>
-                                  </p:stCondLst>
-                                  <p:childTnLst>
-                                    <p:set>
-                                      <p:cBhvr>
-                                        <p:cTn id="111" dur="1" fill="hold">
-                                          <p:stCondLst>
-                                            <p:cond delay="0"/>
-                                          </p:stCondLst>
-                                        </p:cTn>
-                                        <p:tgtEl>
-                                          <p:spTgt spid="72"/>
-                                        </p:tgtEl>
-                                        <p:attrNameLst>
-                                          <p:attrName>style.visibility</p:attrName>
-                                        </p:attrNameLst>
-                                      </p:cBhvr>
-                                      <p:to>
-                                        <p:strVal val="visible"/>
-                                      </p:to>
-                                    </p:set>
-                                    <p:animEffect transition="in" filter="fade">
-                                      <p:cBhvr>
-                                        <p:cTn id="112" dur="500"/>
-                                        <p:tgtEl>
-                                          <p:spTgt spid="72"/>
-                                        </p:tgtEl>
-                                      </p:cBhvr>
-                                    </p:animEffect>
-                                  </p:childTnLst>
-                                </p:cTn>
-                              </p:par>
-                            </p:childTnLst>
-                          </p:cTn>
-                        </p:par>
-                      </p:childTnLst>
-                    </p:cTn>
-                  </p:par>
-                  <p:par>
                     <p:cTn id="113" fill="hold">
                       <p:stCondLst>
                         <p:cond delay="indefinite"/>
@@ -19360,50 +18582,36 @@
       <p:bldP spid="25" grpId="0" animBg="1"/>
       <p:bldP spid="27" grpId="0" animBg="1"/>
       <p:bldP spid="28" grpId="0" animBg="1"/>
-      <p:bldP spid="29" grpId="0" animBg="1"/>
-      <p:bldP spid="30" grpId="0" animBg="1"/>
       <p:bldP spid="31" grpId="0" animBg="1"/>
       <p:bldP spid="32" grpId="0" animBg="1"/>
       <p:bldP spid="33" grpId="0" animBg="1"/>
       <p:bldP spid="34" grpId="0" animBg="1"/>
       <p:bldP spid="35" grpId="0" animBg="1"/>
-      <p:bldP spid="36" grpId="0" animBg="1"/>
-      <p:bldP spid="37" grpId="0" animBg="1"/>
       <p:bldP spid="38" grpId="0" animBg="1"/>
       <p:bldP spid="39" grpId="0" animBg="1"/>
       <p:bldP spid="40" grpId="0" animBg="1"/>
       <p:bldP spid="41" grpId="0" animBg="1"/>
       <p:bldP spid="42" grpId="0" animBg="1"/>
-      <p:bldP spid="43" grpId="0" animBg="1"/>
-      <p:bldP spid="44" grpId="0" animBg="1"/>
       <p:bldP spid="45" grpId="0" animBg="1"/>
       <p:bldP spid="46" grpId="0" animBg="1"/>
       <p:bldP spid="47" grpId="0" animBg="1"/>
       <p:bldP spid="48" grpId="0" animBg="1"/>
       <p:bldP spid="49" grpId="0" animBg="1"/>
-      <p:bldP spid="50" grpId="0" animBg="1"/>
-      <p:bldP spid="51" grpId="0" animBg="1"/>
       <p:bldP spid="52" grpId="0" animBg="1"/>
       <p:bldP spid="53" grpId="0" animBg="1"/>
       <p:bldP spid="54" grpId="0" animBg="1"/>
       <p:bldP spid="55" grpId="0" animBg="1"/>
       <p:bldP spid="56" grpId="0" animBg="1"/>
-      <p:bldP spid="57" grpId="0" animBg="1"/>
-      <p:bldP spid="58" grpId="0" animBg="1"/>
       <p:bldP spid="59" grpId="0" animBg="1"/>
       <p:bldP spid="60" grpId="0" animBg="1"/>
       <p:bldP spid="61" grpId="0" animBg="1"/>
       <p:bldP spid="62" grpId="0" animBg="1"/>
       <p:bldP spid="63" grpId="0" animBg="1"/>
-      <p:bldP spid="64" grpId="0" animBg="1"/>
-      <p:bldP spid="65" grpId="0" animBg="1"/>
       <p:bldP spid="66" grpId="0" animBg="1"/>
       <p:bldP spid="67" grpId="0" animBg="1"/>
       <p:bldP spid="68" grpId="0" animBg="1"/>
       <p:bldP spid="69" grpId="0" animBg="1"/>
       <p:bldP spid="70" grpId="0" animBg="1"/>
-      <p:bldP spid="71" grpId="0" animBg="1"/>
-      <p:bldP spid="72" grpId="0" animBg="1"/>
       <p:bldP spid="73" grpId="0" animBg="1"/>
       <p:bldP spid="74" grpId="0" animBg="1"/>
     </p:bldLst>
@@ -27424,7 +26632,7 @@
       </p:sp>
       <p:pic>
         <p:nvPicPr>
-          <p:cNvPr id="21" name="Picture 13" descr="image.png"/>
+          <p:cNvPr id="14" name="Picture 13" descr="image.png"/>
           <p:cNvPicPr>
             <a:picLocks noChangeAspect="1"/>
           </p:cNvPicPr>
@@ -28801,7 +28009,7 @@
       </p:sp>
       <p:pic>
         <p:nvPicPr>
-          <p:cNvPr id="21" name="Picture 13" descr="image.png"/>
+          <p:cNvPr id="14" name="Picture 13" descr="image.png"/>
           <p:cNvPicPr>
             <a:picLocks noChangeAspect="1"/>
           </p:cNvPicPr>
@@ -30825,7 +30033,7 @@
       </p:sp>
       <p:pic>
         <p:nvPicPr>
-          <p:cNvPr id="21" name="Picture 13" descr="image.png"/>
+          <p:cNvPr id="14" name="Picture 13" descr="image.png"/>
           <p:cNvPicPr>
             <a:picLocks noChangeAspect="1"/>
           </p:cNvPicPr>
@@ -39462,59 +38670,6 @@
                                         <p:cTn id="12" dur="500"/>
                                         <p:tgtEl>
                                           <p:spTgt spid="28"/>
-                                        </p:tgtEl>
-                                      </p:cBhvr>
-                                    </p:animEffect>
-                                  </p:childTnLst>
-                                </p:cTn>
-                              </p:par>
-                            </p:childTnLst>
-                          </p:cTn>
-                        </p:par>
-                      </p:childTnLst>
-                    </p:cTn>
-                  </p:par>
-                  <p:par>
-                    <p:cTn id="13" fill="hold">
-                      <p:stCondLst>
-                        <p:cond delay="indefinite"/>
-                      </p:stCondLst>
-                      <p:childTnLst>
-                        <p:par>
-                          <p:cTn id="14" fill="hold">
-                            <p:stCondLst>
-                              <p:cond delay="0"/>
-                            </p:stCondLst>
-                            <p:childTnLst>
-                              <p:par>
-                                <p:cTn id="15" presetID="10" presetClass="entr" presetSubtype="0" fill="hold" grpId="0" nodeType="clickEffect">
-                                  <p:stCondLst>
-                                    <p:cond delay="0"/>
-                                  </p:stCondLst>
-                                  <p:childTnLst>
-                                    <p:set>
-                                      <p:cBhvr>
-                                        <p:cTn id="16" dur="1" fill="hold">
-                                          <p:stCondLst>
-                                            <p:cond delay="0"/>
-                                          </p:stCondLst>
-                                        </p:cTn>
-                                        <p:tgtEl>
-                                          <p:spTgt spid="29"/>
-                                        </p:tgtEl>
-                                        <p:attrNameLst>
-                                          <p:attrName>style.visibility</p:attrName>
-                                        </p:attrNameLst>
-                                      </p:cBhvr>
-                                      <p:to>
-                                        <p:strVal val="visible"/>
-                                      </p:to>
-                                    </p:set>
-                                    <p:animEffect transition="in" filter="fade">
-                                      <p:cBhvr>
-                                        <p:cTn id="17" dur="500"/>
-                                        <p:tgtEl>
-                                          <p:spTgt spid="29"/>
                                         </p:tgtEl>
                                       </p:cBhvr>
                                     </p:animEffect>
@@ -39646,41 +38801,6 @@
                             </p:stCondLst>
                             <p:childTnLst>
                               <p:par>
-                                <p:cTn id="30" presetID="10" presetClass="entr" presetSubtype="0" fill="hold" grpId="0" nodeType="clickEffect">
-                                  <p:stCondLst>
-                                    <p:cond delay="0"/>
-                                  </p:stCondLst>
-                                  <p:childTnLst>
-                                    <p:set>
-                                      <p:cBhvr>
-                                        <p:cTn id="31" dur="1" fill="hold">
-                                          <p:stCondLst>
-                                            <p:cond delay="0"/>
-                                          </p:stCondLst>
-                                        </p:cTn>
-                                        <p:tgtEl>
-                                          <p:spTgt spid="32"/>
-                                        </p:tgtEl>
-                                        <p:attrNameLst>
-                                          <p:attrName>style.visibility</p:attrName>
-                                        </p:attrNameLst>
-                                      </p:cBhvr>
-                                      <p:to>
-                                        <p:strVal val="visible"/>
-                                      </p:to>
-                                    </p:set>
-                                    <p:animEffect transition="in" filter="fade">
-                                      <p:cBhvr>
-                                        <p:cTn id="32" dur="500"/>
-                                        <p:tgtEl>
-                                          <p:spTgt spid="32"/>
-                                        </p:tgtEl>
-                                      </p:cBhvr>
-                                    </p:animEffect>
-                                  </p:childTnLst>
-                                </p:cTn>
-                              </p:par>
-                              <p:par>
                                 <p:cTn id="33" presetID="10" presetClass="entr" presetSubtype="0" fill="hold" grpId="0" nodeType="withEffect">
                                   <p:stCondLst>
                                     <p:cond delay="0"/>
@@ -39799,10 +38919,8 @@
       <p:bldP spid="25" grpId="0" animBg="1"/>
       <p:bldP spid="27" grpId="0" animBg="1"/>
       <p:bldP spid="28" grpId="0" animBg="1"/>
-      <p:bldP spid="29" grpId="0" animBg="1"/>
       <p:bldP spid="30" grpId="0" animBg="1"/>
       <p:bldP spid="31" grpId="0" animBg="1"/>
-      <p:bldP spid="32" grpId="0" animBg="1"/>
       <p:bldP spid="33" grpId="0" animBg="1"/>
     </p:bldLst>
   </p:timing>
@@ -40038,7 +39156,7 @@
       </p:sp>
       <p:pic>
         <p:nvPicPr>
-          <p:cNvPr id="49" name="Picture 26" descr="image.png"/>
+          <p:cNvPr id="27" name="Picture 26" descr="image.png"/>
           <p:cNvPicPr>
             <a:picLocks noChangeAspect="1"/>
           </p:cNvPicPr>
@@ -50477,164 +49595,6 @@
                     </p:cTn>
                   </p:par>
                   <p:par>
-                    <p:cTn id="31" fill="hold">
-                      <p:stCondLst>
-                        <p:cond delay="indefinite"/>
-                      </p:stCondLst>
-                      <p:childTnLst>
-                        <p:par>
-                          <p:cTn id="32" fill="hold">
-                            <p:stCondLst>
-                              <p:cond delay="0"/>
-                            </p:stCondLst>
-                            <p:childTnLst>
-                              <p:par>
-                                <p:cTn id="33" presetID="10" presetClass="entr" presetSubtype="0" fill="hold" grpId="0" nodeType="clickEffect">
-                                  <p:stCondLst>
-                                    <p:cond delay="0"/>
-                                  </p:stCondLst>
-                                  <p:childTnLst>
-                                    <p:set>
-                                      <p:cBhvr>
-                                        <p:cTn id="34" dur="1" fill="hold">
-                                          <p:stCondLst>
-                                            <p:cond delay="0"/>
-                                          </p:stCondLst>
-                                        </p:cTn>
-                                        <p:tgtEl>
-                                          <p:spTgt spid="35"/>
-                                        </p:tgtEl>
-                                        <p:attrNameLst>
-                                          <p:attrName>style.visibility</p:attrName>
-                                        </p:attrNameLst>
-                                      </p:cBhvr>
-                                      <p:to>
-                                        <p:strVal val="visible"/>
-                                      </p:to>
-                                    </p:set>
-                                    <p:animEffect transition="in" filter="fade">
-                                      <p:cBhvr>
-                                        <p:cTn id="35" dur="500"/>
-                                        <p:tgtEl>
-                                          <p:spTgt spid="35"/>
-                                        </p:tgtEl>
-                                      </p:cBhvr>
-                                    </p:animEffect>
-                                  </p:childTnLst>
-                                </p:cTn>
-                              </p:par>
-                              <p:par>
-                                <p:cTn id="36" presetID="10" presetClass="entr" presetSubtype="0" fill="hold" grpId="0" nodeType="withEffect">
-                                  <p:stCondLst>
-                                    <p:cond delay="0"/>
-                                  </p:stCondLst>
-                                  <p:childTnLst>
-                                    <p:set>
-                                      <p:cBhvr>
-                                        <p:cTn id="37" dur="1" fill="hold">
-                                          <p:stCondLst>
-                                            <p:cond delay="0"/>
-                                          </p:stCondLst>
-                                        </p:cTn>
-                                        <p:tgtEl>
-                                          <p:spTgt spid="36"/>
-                                        </p:tgtEl>
-                                        <p:attrNameLst>
-                                          <p:attrName>style.visibility</p:attrName>
-                                        </p:attrNameLst>
-                                      </p:cBhvr>
-                                      <p:to>
-                                        <p:strVal val="visible"/>
-                                      </p:to>
-                                    </p:set>
-                                    <p:animEffect transition="in" filter="fade">
-                                      <p:cBhvr>
-                                        <p:cTn id="38" dur="500"/>
-                                        <p:tgtEl>
-                                          <p:spTgt spid="36"/>
-                                        </p:tgtEl>
-                                      </p:cBhvr>
-                                    </p:animEffect>
-                                  </p:childTnLst>
-                                </p:cTn>
-                              </p:par>
-                              <p:par>
-                                <p:cTn id="39" presetID="10" presetClass="entr" presetSubtype="0" fill="hold" grpId="0" nodeType="withEffect">
-                                  <p:stCondLst>
-                                    <p:cond delay="0"/>
-                                  </p:stCondLst>
-                                  <p:childTnLst>
-                                    <p:set>
-                                      <p:cBhvr>
-                                        <p:cTn id="40" dur="1" fill="hold">
-                                          <p:stCondLst>
-                                            <p:cond delay="0"/>
-                                          </p:stCondLst>
-                                        </p:cTn>
-                                        <p:tgtEl>
-                                          <p:spTgt spid="37"/>
-                                        </p:tgtEl>
-                                        <p:attrNameLst>
-                                          <p:attrName>style.visibility</p:attrName>
-                                        </p:attrNameLst>
-                                      </p:cBhvr>
-                                      <p:to>
-                                        <p:strVal val="visible"/>
-                                      </p:to>
-                                    </p:set>
-                                    <p:animEffect transition="in" filter="fade">
-                                      <p:cBhvr>
-                                        <p:cTn id="41" dur="500"/>
-                                        <p:tgtEl>
-                                          <p:spTgt spid="37"/>
-                                        </p:tgtEl>
-                                      </p:cBhvr>
-                                    </p:animEffect>
-                                  </p:childTnLst>
-                                </p:cTn>
-                              </p:par>
-                              <p:par>
-                                <p:cTn id="42" presetID="10" presetClass="entr" presetSubtype="0" fill="hold" grpId="0" nodeType="withEffect">
-                                  <p:stCondLst>
-                                    <p:cond delay="0"/>
-                                  </p:stCondLst>
-                                  <p:childTnLst>
-                                    <p:set>
-                                      <p:cBhvr>
-                                        <p:cTn id="43" dur="1" fill="hold">
-                                          <p:stCondLst>
-                                            <p:cond delay="0"/>
-                                          </p:stCondLst>
-                                        </p:cTn>
-                                        <p:tgtEl>
-                                          <p:spTgt spid="38"/>
-                                        </p:tgtEl>
-                                        <p:attrNameLst>
-                                          <p:attrName>style.visibility</p:attrName>
-                                        </p:attrNameLst>
-                                      </p:cBhvr>
-                                      <p:to>
-                                        <p:strVal val="visible"/>
-                                      </p:to>
-                                    </p:set>
-                                    <p:animEffect transition="in" filter="fade">
-                                      <p:cBhvr>
-                                        <p:cTn id="44" dur="500"/>
-                                        <p:tgtEl>
-                                          <p:spTgt spid="38"/>
-                                        </p:tgtEl>
-                                      </p:cBhvr>
-                                    </p:animEffect>
-                                  </p:childTnLst>
-                                </p:cTn>
-                              </p:par>
-                            </p:childTnLst>
-                          </p:cTn>
-                        </p:par>
-                      </p:childTnLst>
-                    </p:cTn>
-                  </p:par>
-                  <p:par>
                     <p:cTn id="45" fill="hold">
                       <p:stCondLst>
                         <p:cond delay="indefinite"/>
@@ -51034,10 +49994,6 @@
       <p:bldP spid="32" grpId="0" animBg="1"/>
       <p:bldP spid="33" grpId="0" animBg="1"/>
       <p:bldP spid="34" grpId="0" animBg="1"/>
-      <p:bldP spid="35" grpId="0" animBg="1"/>
-      <p:bldP spid="36" grpId="0" animBg="1"/>
-      <p:bldP spid="37" grpId="0" animBg="1"/>
-      <p:bldP spid="38" grpId="0" animBg="1"/>
       <p:bldP spid="39" grpId="0" animBg="1"/>
       <p:bldP spid="40" grpId="0" animBg="1"/>
       <p:bldP spid="41" grpId="0" animBg="1"/>
@@ -51280,7 +50236,7 @@
       </p:sp>
       <p:pic>
         <p:nvPicPr>
-          <p:cNvPr id="49" name="Picture 26" descr="image.png"/>
+          <p:cNvPr id="27" name="Picture 26" descr="image.png"/>
           <p:cNvPicPr>
             <a:picLocks noChangeAspect="1"/>
           </p:cNvPicPr>
@@ -52548,7 +51504,7 @@
       </p:sp>
       <p:pic>
         <p:nvPicPr>
-          <p:cNvPr id="20" name="Picture 13" descr="image.png"/>
+          <p:cNvPr id="14" name="Picture 13" descr="image.png"/>
           <p:cNvPicPr>
             <a:picLocks noChangeAspect="1"/>
           </p:cNvPicPr>
@@ -54651,7 +53607,7 @@
       </p:sp>
       <p:pic>
         <p:nvPicPr>
-          <p:cNvPr id="45" name="Picture 26" descr="image.png"/>
+          <p:cNvPr id="27" name="Picture 26" descr="image.png"/>
           <p:cNvPicPr>
             <a:picLocks noChangeAspect="1"/>
           </p:cNvPicPr>
